--- a/08-Kubernetes/session4/08-04-Core-Workloads-Deployments.pptx
+++ b/08-Kubernetes/session4/08-04-Core-Workloads-Deployments.pptx
@@ -4199,8 +4199,8 @@
         </p:nvSpPr>
         <p:spPr>
           <a:xfrm>
-            <a:off x="731520" y="1645920"/>
-            <a:ext cx="7680960" cy="2743200"/>
+            <a:off x="373380" y="1645920"/>
+            <a:ext cx="8039100" cy="2743200"/>
           </a:xfrm>
           <a:prstGeom prst="rect">
             <a:avLst/>
